--- a/docs/lectures/99-Summary.pptx
+++ b/docs/lectures/99-Summary.pptx
@@ -1,171 +1,94 @@
 
-<file path=ppt/presentation.xml><?xml version="1.0" encoding="utf-8"?>
-<p:presentation xmlns:a="http://schemas.openxmlformats.org/drawingml/2006/main" xmlns:r="http://schemas.openxmlformats.org/officeDocument/2006/relationships" xmlns:p="http://schemas.openxmlformats.org/presentationml/2006/main" saveSubsetFonts="1">
-  <p:sldMasterIdLst>
-    <p:sldMasterId id="2147483660" r:id="rId1"/>
-  </p:sldMasterIdLst>
-  <p:handoutMasterIdLst>
-    <p:handoutMasterId r:id="rId28"/>
-  </p:handoutMasterIdLst>
-  <p:sldIdLst>
-    <p:sldId id="256" r:id="rId2"/>
-    <p:sldId id="257" r:id="rId3"/>
-    <p:sldId id="374" r:id="rId4"/>
-    <p:sldId id="339" r:id="rId5"/>
-    <p:sldId id="365" r:id="rId6"/>
-    <p:sldId id="298" r:id="rId7"/>
-    <p:sldId id="366" r:id="rId8"/>
-    <p:sldId id="360" r:id="rId9"/>
-    <p:sldId id="367" r:id="rId10"/>
-    <p:sldId id="341" r:id="rId11"/>
-    <p:sldId id="368" r:id="rId12"/>
-    <p:sldId id="317" r:id="rId13"/>
-    <p:sldId id="369" r:id="rId14"/>
-    <p:sldId id="323" r:id="rId15"/>
-    <p:sldId id="371" r:id="rId16"/>
-    <p:sldId id="310" r:id="rId17"/>
-    <p:sldId id="370" r:id="rId18"/>
-    <p:sldId id="325" r:id="rId19"/>
-    <p:sldId id="372" r:id="rId20"/>
-    <p:sldId id="334" r:id="rId21"/>
-    <p:sldId id="373" r:id="rId22"/>
-    <p:sldId id="361" r:id="rId23"/>
-    <p:sldId id="362" r:id="rId24"/>
-    <p:sldId id="363" r:id="rId25"/>
-    <p:sldId id="364" r:id="rId26"/>
-    <p:sldId id="260" r:id="rId27"/>
-  </p:sldIdLst>
-  <p:sldSz cx="9144000" cy="6858000" type="screen4x3"/>
-  <p:notesSz cx="6858000" cy="9144000"/>
-  <p:defaultTextStyle>
-    <a:defPPr>
-      <a:defRPr lang="en-US"/>
-    </a:defPPr>
-    <a:lvl1pPr marL="0" algn="l" defTabSz="914400" rtl="0" eaLnBrk="1" latinLnBrk="0" hangingPunct="1">
-      <a:defRPr sz="1800" kern="1200">
-        <a:solidFill>
-          <a:schemeClr val="tx1"/>
-        </a:solidFill>
-        <a:latin typeface="+mn-lt"/>
-        <a:ea typeface="+mn-ea"/>
-        <a:cs typeface="+mn-cs"/>
-      </a:defRPr>
-    </a:lvl1pPr>
-    <a:lvl2pPr marL="457200" algn="l" defTabSz="914400" rtl="0" eaLnBrk="1" latinLnBrk="0" hangingPunct="1">
-      <a:defRPr sz="1800" kern="1200">
-        <a:solidFill>
-          <a:schemeClr val="tx1"/>
-        </a:solidFill>
-        <a:latin typeface="+mn-lt"/>
-        <a:ea typeface="+mn-ea"/>
-        <a:cs typeface="+mn-cs"/>
-      </a:defRPr>
-    </a:lvl2pPr>
-    <a:lvl3pPr marL="914400" algn="l" defTabSz="914400" rtl="0" eaLnBrk="1" latinLnBrk="0" hangingPunct="1">
-      <a:defRPr sz="1800" kern="1200">
-        <a:solidFill>
-          <a:schemeClr val="tx1"/>
-        </a:solidFill>
-        <a:latin typeface="+mn-lt"/>
-        <a:ea typeface="+mn-ea"/>
-        <a:cs typeface="+mn-cs"/>
-      </a:defRPr>
-    </a:lvl3pPr>
-    <a:lvl4pPr marL="1371600" algn="l" defTabSz="914400" rtl="0" eaLnBrk="1" latinLnBrk="0" hangingPunct="1">
-      <a:defRPr sz="1800" kern="1200">
-        <a:solidFill>
-          <a:schemeClr val="tx1"/>
-        </a:solidFill>
-        <a:latin typeface="+mn-lt"/>
-        <a:ea typeface="+mn-ea"/>
-        <a:cs typeface="+mn-cs"/>
-      </a:defRPr>
-    </a:lvl4pPr>
-    <a:lvl5pPr marL="1828800" algn="l" defTabSz="914400" rtl="0" eaLnBrk="1" latinLnBrk="0" hangingPunct="1">
-      <a:defRPr sz="1800" kern="1200">
-        <a:solidFill>
-          <a:schemeClr val="tx1"/>
-        </a:solidFill>
-        <a:latin typeface="+mn-lt"/>
-        <a:ea typeface="+mn-ea"/>
-        <a:cs typeface="+mn-cs"/>
-      </a:defRPr>
-    </a:lvl5pPr>
-    <a:lvl6pPr marL="2286000" algn="l" defTabSz="914400" rtl="0" eaLnBrk="1" latinLnBrk="0" hangingPunct="1">
-      <a:defRPr sz="1800" kern="1200">
-        <a:solidFill>
-          <a:schemeClr val="tx1"/>
-        </a:solidFill>
-        <a:latin typeface="+mn-lt"/>
-        <a:ea typeface="+mn-ea"/>
-        <a:cs typeface="+mn-cs"/>
-      </a:defRPr>
-    </a:lvl6pPr>
-    <a:lvl7pPr marL="2743200" algn="l" defTabSz="914400" rtl="0" eaLnBrk="1" latinLnBrk="0" hangingPunct="1">
-      <a:defRPr sz="1800" kern="1200">
-        <a:solidFill>
-          <a:schemeClr val="tx1"/>
-        </a:solidFill>
-        <a:latin typeface="+mn-lt"/>
-        <a:ea typeface="+mn-ea"/>
-        <a:cs typeface="+mn-cs"/>
-      </a:defRPr>
-    </a:lvl7pPr>
-    <a:lvl8pPr marL="3200400" algn="l" defTabSz="914400" rtl="0" eaLnBrk="1" latinLnBrk="0" hangingPunct="1">
-      <a:defRPr sz="1800" kern="1200">
-        <a:solidFill>
-          <a:schemeClr val="tx1"/>
-        </a:solidFill>
-        <a:latin typeface="+mn-lt"/>
-        <a:ea typeface="+mn-ea"/>
-        <a:cs typeface="+mn-cs"/>
-      </a:defRPr>
-    </a:lvl8pPr>
-    <a:lvl9pPr marL="3657600" algn="l" defTabSz="914400" rtl="0" eaLnBrk="1" latinLnBrk="0" hangingPunct="1">
-      <a:defRPr sz="1800" kern="1200">
-        <a:solidFill>
-          <a:schemeClr val="tx1"/>
-        </a:solidFill>
-        <a:latin typeface="+mn-lt"/>
-        <a:ea typeface="+mn-ea"/>
-        <a:cs typeface="+mn-cs"/>
-      </a:defRPr>
-    </a:lvl9pPr>
-  </p:defaultTextStyle>
-  <p:extLst>
-    <p:ext uri="{EFAFB233-063F-42B5-8137-9DF3F51BA10A}">
-      <p15:sldGuideLst xmlns:p15="http://schemas.microsoft.com/office/powerpoint/2012/main">
-        <p15:guide id="1" orient="horz" pos="2160">
-          <p15:clr>
-            <a:srgbClr val="A4A3A4"/>
-          </p15:clr>
-        </p15:guide>
-        <p15:guide id="2" pos="2880">
-          <p15:clr>
-            <a:srgbClr val="A4A3A4"/>
-          </p15:clr>
-        </p15:guide>
-      </p15:sldGuideLst>
-    </p:ext>
-    <p:ext uri="{2D200454-40CA-4A62-9FC3-DE9A4176ACB9}">
-      <p15:notesGuideLst xmlns:p15="http://schemas.microsoft.com/office/powerpoint/2012/main">
-        <p15:guide id="1" orient="horz" pos="2880">
-          <p15:clr>
-            <a:srgbClr val="A4A3A4"/>
-          </p15:clr>
-        </p15:guide>
-        <p15:guide id="2" pos="2160">
-          <p15:clr>
-            <a:srgbClr val="A4A3A4"/>
-          </p15:clr>
-        </p15:guide>
-      </p15:notesGuideLst>
-    </p:ext>
-  </p:extLst>
-</p:presentation>
+<file path=docProps\app.xml><?xml version="1.0" encoding="utf-8"?>
+<Properties xmlns="http://schemas.openxmlformats.org/officeDocument/2006/extended-properties" xmlns:vt="http://schemas.openxmlformats.org/officeDocument/2006/docPropsVTypes">
+  <Template/>
+  <TotalTime>1002</TotalTime>
+  <Words>1109</Words>
+  <Application>Microsoft Office PowerPoint</Application>
+  <PresentationFormat>On-screen Show (4:3)</PresentationFormat>
+  <Paragraphs>166</Paragraphs>
+  <Slides>26</Slides>
+  <Notes>0</Notes>
+  <HiddenSlides>0</HiddenSlides>
+  <MMClips>0</MMClips>
+  <ScaleCrop>false</ScaleCrop>
+  <HeadingPairs>
+    <vt:vector size="6" baseType="variant">
+      <vt:variant>
+        <vt:lpstr>Fonts Used</vt:lpstr>
+      </vt:variant>
+      <vt:variant>
+        <vt:i4>4</vt:i4>
+      </vt:variant>
+      <vt:variant>
+        <vt:lpstr>Theme</vt:lpstr>
+      </vt:variant>
+      <vt:variant>
+        <vt:i4>1</vt:i4>
+      </vt:variant>
+      <vt:variant>
+        <vt:lpstr>Slide Titles</vt:lpstr>
+      </vt:variant>
+      <vt:variant>
+        <vt:i4>26</vt:i4>
+      </vt:variant>
+    </vt:vector>
+  </HeadingPairs>
+  <TitlesOfParts>
+    <vt:vector size="31" baseType="lpstr">
+      <vt:lpstr>Arial</vt:lpstr>
+      <vt:lpstr>Calibri</vt:lpstr>
+      <vt:lpstr>Courier New</vt:lpstr>
+      <vt:lpstr>Wingdings</vt:lpstr>
+      <vt:lpstr>1_Office Theme</vt:lpstr>
+      <vt:lpstr>The Last Waltz</vt:lpstr>
+      <vt:lpstr>The Last Waltz</vt:lpstr>
+      <vt:lpstr>My goals</vt:lpstr>
+      <vt:lpstr>01: Overview</vt:lpstr>
+      <vt:lpstr>PowerPoint Presentation</vt:lpstr>
+      <vt:lpstr>02: Discrete distributions</vt:lpstr>
+      <vt:lpstr>PowerPoint Presentation</vt:lpstr>
+      <vt:lpstr>03: Two-way tables</vt:lpstr>
+      <vt:lpstr>PowerPoint Presentation</vt:lpstr>
+      <vt:lpstr>04: Loglinar models, mosaic displays</vt:lpstr>
+      <vt:lpstr>PowerPoint Presentation</vt:lpstr>
+      <vt:lpstr>05: Correspondence analysis</vt:lpstr>
+      <vt:lpstr>PowerPoint Presentation</vt:lpstr>
+      <vt:lpstr>06: Logistic regression</vt:lpstr>
+      <vt:lpstr>PowerPoint Presentation</vt:lpstr>
+      <vt:lpstr>07: Logistic regression: Extensions</vt:lpstr>
+      <vt:lpstr>PowerPoint Presentation</vt:lpstr>
+      <vt:lpstr>08: Extending loglinear models</vt:lpstr>
+      <vt:lpstr>PowerPoint Presentation</vt:lpstr>
+      <vt:lpstr>09: GLMs for Count Data</vt:lpstr>
+      <vt:lpstr>PowerPoint Presentation</vt:lpstr>
+      <vt:lpstr>10: Models for log odds &amp; LORs</vt:lpstr>
+      <vt:lpstr>Your turn: Feedback?</vt:lpstr>
+      <vt:lpstr>What did you like/dislike about 6136?</vt:lpstr>
+      <vt:lpstr>Tips for next time …</vt:lpstr>
+      <vt:lpstr>PowerPoint Presentation</vt:lpstr>
+    </vt:vector>
+  </TitlesOfParts>
+  <Company>YORK UNIVERSITY</Company>
+  <LinksUpToDate>false</LinksUpToDate>
+  <SharedDoc>false</SharedDoc>
+  <HyperlinksChanged>false</HyperlinksChanged>
+  <AppVersion>16.0000</AppVersion>
+</Properties>
 </file>
 
-<file path=ppt/diagrams/colors1.xml><?xml version="1.0" encoding="utf-8"?>
+<file path=docProps\core.xml><?xml version="1.0" encoding="utf-8"?>
+<cp:coreProperties xmlns:cp="http://schemas.openxmlformats.org/package/2006/metadata/core-properties" xmlns:dc="http://purl.org/dc/elements/1.1/" xmlns:dcterms="http://purl.org/dc/terms/" xmlns:dcmitype="http://purl.org/dc/dcmitype/" xmlns:xsi="http://www.w3.org/2001/XMLSchema-instance">
+  <dc:title>title</dc:title>
+  <dc:creator>Michael Friendly</dc:creator>
+  <cp:lastModifiedBy>Michael L Friendly</cp:lastModifiedBy>
+  <cp:revision>29</cp:revision>
+  <dcterms:created xsi:type="dcterms:W3CDTF">2017-10-14T20:35:56Z</dcterms:created>
+  <dcterms:modified xsi:type="dcterms:W3CDTF">2023-04-04T18:02:39Z</dcterms:modified>
+</cp:coreProperties>
+</file>
+
+<file path=ppt\diagrams\colors1.xml><?xml version="1.0" encoding="utf-8"?>
 <dgm:colorsDef xmlns:dgm="http://schemas.openxmlformats.org/drawingml/2006/diagram" xmlns:a="http://schemas.openxmlformats.org/drawingml/2006/main" uniqueId="urn:microsoft.com/office/officeart/2005/8/colors/accent1_2">
   <dgm:title val=""/>
   <dgm:desc val=""/>
@@ -912,7 +835,7 @@
 </dgm:colorsDef>
 </file>
 
-<file path=ppt/diagrams/data1.xml><?xml version="1.0" encoding="utf-8"?>
+<file path=ppt\diagrams\data1.xml><?xml version="1.0" encoding="utf-8"?>
 <dgm:dataModel xmlns:dgm="http://schemas.openxmlformats.org/drawingml/2006/diagram" xmlns:a="http://schemas.openxmlformats.org/drawingml/2006/main">
   <dgm:ptLst>
     <dgm:pt modelId="{233433E0-C328-4AD6-84B4-CF9934BF7D41}" type="doc">
@@ -1383,7 +1306,7 @@
 </dgm:dataModel>
 </file>
 
-<file path=ppt/diagrams/drawing1.xml><?xml version="1.0" encoding="utf-8"?>
+<file path=ppt\diagrams\drawing1.xml><?xml version="1.0" encoding="utf-8"?>
 <dsp:drawing xmlns:dgm="http://schemas.openxmlformats.org/drawingml/2006/diagram" xmlns:dsp="http://schemas.microsoft.com/office/drawing/2008/diagram" xmlns:a="http://schemas.openxmlformats.org/drawingml/2006/main">
   <dsp:spTree>
     <dsp:nvGrpSpPr>
@@ -1971,7 +1894,7 @@
 </dsp:drawing>
 </file>
 
-<file path=ppt/diagrams/layout1.xml><?xml version="1.0" encoding="utf-8"?>
+<file path=ppt\diagrams\layout1.xml><?xml version="1.0" encoding="utf-8"?>
 <dgm:layoutDef xmlns:dgm="http://schemas.openxmlformats.org/drawingml/2006/diagram" xmlns:a="http://schemas.openxmlformats.org/drawingml/2006/main" uniqueId="urn:microsoft.com/office/officeart/2018/2/layout/IconVerticalSolidList">
   <dgm:title val="Icon Vertical Solid List"/>
   <dgm:desc val="Use to show a series of visuals from top to bottom with Level 1 or Level 1 and Level 2 text grouped in a shape. Works best with icons or small pictures with lengthier descriptions."/>
@@ -2265,7 +2188,7 @@
 </dgm:layoutDef>
 </file>
 
-<file path=ppt/diagrams/quickStyle1.xml><?xml version="1.0" encoding="utf-8"?>
+<file path=ppt\diagrams\quickStyle1.xml><?xml version="1.0" encoding="utf-8"?>
 <dgm:styleDef xmlns:dgm="http://schemas.openxmlformats.org/drawingml/2006/diagram" xmlns:a="http://schemas.openxmlformats.org/drawingml/2006/main" uniqueId="urn:microsoft.com/office/officeart/2005/8/quickstyle/simple1">
   <dgm:title val=""/>
   <dgm:desc val=""/>
@@ -3299,7 +3222,7 @@
 </dgm:styleDef>
 </file>
 
-<file path=ppt/handoutMasters/handoutMaster1.xml><?xml version="1.0" encoding="utf-8"?>
+<file path=ppt\handoutMasters\handoutMaster1.xml><?xml version="1.0" encoding="utf-8"?>
 <p:handoutMaster xmlns:a="http://schemas.openxmlformats.org/drawingml/2006/main" xmlns:r="http://schemas.openxmlformats.org/officeDocument/2006/relationships" xmlns:p="http://schemas.openxmlformats.org/presentationml/2006/main">
   <p:cSld>
     <p:bg>
@@ -3464,7 +3387,189 @@
 </p:handoutMaster>
 </file>
 
-<file path=ppt/slideLayouts/slideLayout1.xml><?xml version="1.0" encoding="utf-8"?>
+<file path=ppt\presProps.xml><?xml version="1.0" encoding="utf-8"?>
+<p:presentationPr xmlns:a="http://schemas.openxmlformats.org/drawingml/2006/main" xmlns:r="http://schemas.openxmlformats.org/officeDocument/2006/relationships" xmlns:p="http://schemas.openxmlformats.org/presentationml/2006/main">
+  <p:extLst>
+    <p:ext uri="{E76CE94A-603C-4142-B9EB-6D1370010A27}">
+      <p14:discardImageEditData xmlns:p14="http://schemas.microsoft.com/office/powerpoint/2010/main" val="0"/>
+    </p:ext>
+    <p:ext uri="{D31A062A-798A-4329-ABDD-BBA856620510}">
+      <p14:defaultImageDpi xmlns:p14="http://schemas.microsoft.com/office/powerpoint/2010/main" val="220"/>
+    </p:ext>
+    <p:ext uri="{FD5EFAAD-0ECE-453E-9831-46B23BE46B34}">
+      <p15:chartTrackingRefBased xmlns:p15="http://schemas.microsoft.com/office/powerpoint/2012/main" val="0"/>
+    </p:ext>
+  </p:extLst>
+</p:presentationPr>
+</file>
+
+<file path=ppt\presentation.xml><?xml version="1.0" encoding="utf-8"?>
+<p:presentation xmlns:a="http://schemas.openxmlformats.org/drawingml/2006/main" xmlns:r="http://schemas.openxmlformats.org/officeDocument/2006/relationships" xmlns:p="http://schemas.openxmlformats.org/presentationml/2006/main" saveSubsetFonts="1">
+  <p:sldMasterIdLst>
+    <p:sldMasterId id="2147483660" r:id="rId1"/>
+  </p:sldMasterIdLst>
+  <p:handoutMasterIdLst>
+    <p:handoutMasterId r:id="rId28"/>
+  </p:handoutMasterIdLst>
+  <p:sldIdLst>
+    <p:sldId id="256" r:id="rId2"/>
+    <p:sldId id="257" r:id="rId3"/>
+    <p:sldId id="374" r:id="rId4"/>
+    <p:sldId id="339" r:id="rId5"/>
+    <p:sldId id="365" r:id="rId6"/>
+    <p:sldId id="298" r:id="rId7"/>
+    <p:sldId id="366" r:id="rId8"/>
+    <p:sldId id="360" r:id="rId9"/>
+    <p:sldId id="367" r:id="rId10"/>
+    <p:sldId id="341" r:id="rId11"/>
+    <p:sldId id="368" r:id="rId12"/>
+    <p:sldId id="317" r:id="rId13"/>
+    <p:sldId id="369" r:id="rId14"/>
+    <p:sldId id="323" r:id="rId15"/>
+    <p:sldId id="371" r:id="rId16"/>
+    <p:sldId id="310" r:id="rId17"/>
+    <p:sldId id="370" r:id="rId18"/>
+    <p:sldId id="325" r:id="rId19"/>
+    <p:sldId id="372" r:id="rId20"/>
+    <p:sldId id="334" r:id="rId21"/>
+    <p:sldId id="373" r:id="rId22"/>
+    <p:sldId id="361" r:id="rId23"/>
+    <p:sldId id="362" r:id="rId24"/>
+    <p:sldId id="363" r:id="rId25"/>
+    <p:sldId id="364" r:id="rId26"/>
+    <p:sldId id="260" r:id="rId27"/>
+  </p:sldIdLst>
+  <p:sldSz cx="9144000" cy="6858000" type="screen4x3"/>
+  <p:notesSz cx="6858000" cy="9144000"/>
+  <p:defaultTextStyle>
+    <a:defPPr>
+      <a:defRPr lang="en-US"/>
+    </a:defPPr>
+    <a:lvl1pPr marL="0" algn="l" defTabSz="914400" rtl="0" eaLnBrk="1" latinLnBrk="0" hangingPunct="1">
+      <a:defRPr sz="1800" kern="1200">
+        <a:solidFill>
+          <a:schemeClr val="tx1"/>
+        </a:solidFill>
+        <a:latin typeface="+mn-lt"/>
+        <a:ea typeface="+mn-ea"/>
+        <a:cs typeface="+mn-cs"/>
+      </a:defRPr>
+    </a:lvl1pPr>
+    <a:lvl2pPr marL="457200" algn="l" defTabSz="914400" rtl="0" eaLnBrk="1" latinLnBrk="0" hangingPunct="1">
+      <a:defRPr sz="1800" kern="1200">
+        <a:solidFill>
+          <a:schemeClr val="tx1"/>
+        </a:solidFill>
+        <a:latin typeface="+mn-lt"/>
+        <a:ea typeface="+mn-ea"/>
+        <a:cs typeface="+mn-cs"/>
+      </a:defRPr>
+    </a:lvl2pPr>
+    <a:lvl3pPr marL="914400" algn="l" defTabSz="914400" rtl="0" eaLnBrk="1" latinLnBrk="0" hangingPunct="1">
+      <a:defRPr sz="1800" kern="1200">
+        <a:solidFill>
+          <a:schemeClr val="tx1"/>
+        </a:solidFill>
+        <a:latin typeface="+mn-lt"/>
+        <a:ea typeface="+mn-ea"/>
+        <a:cs typeface="+mn-cs"/>
+      </a:defRPr>
+    </a:lvl3pPr>
+    <a:lvl4pPr marL="1371600" algn="l" defTabSz="914400" rtl="0" eaLnBrk="1" latinLnBrk="0" hangingPunct="1">
+      <a:defRPr sz="1800" kern="1200">
+        <a:solidFill>
+          <a:schemeClr val="tx1"/>
+        </a:solidFill>
+        <a:latin typeface="+mn-lt"/>
+        <a:ea typeface="+mn-ea"/>
+        <a:cs typeface="+mn-cs"/>
+      </a:defRPr>
+    </a:lvl4pPr>
+    <a:lvl5pPr marL="1828800" algn="l" defTabSz="914400" rtl="0" eaLnBrk="1" latinLnBrk="0" hangingPunct="1">
+      <a:defRPr sz="1800" kern="1200">
+        <a:solidFill>
+          <a:schemeClr val="tx1"/>
+        </a:solidFill>
+        <a:latin typeface="+mn-lt"/>
+        <a:ea typeface="+mn-ea"/>
+        <a:cs typeface="+mn-cs"/>
+      </a:defRPr>
+    </a:lvl5pPr>
+    <a:lvl6pPr marL="2286000" algn="l" defTabSz="914400" rtl="0" eaLnBrk="1" latinLnBrk="0" hangingPunct="1">
+      <a:defRPr sz="1800" kern="1200">
+        <a:solidFill>
+          <a:schemeClr val="tx1"/>
+        </a:solidFill>
+        <a:latin typeface="+mn-lt"/>
+        <a:ea typeface="+mn-ea"/>
+        <a:cs typeface="+mn-cs"/>
+      </a:defRPr>
+    </a:lvl6pPr>
+    <a:lvl7pPr marL="2743200" algn="l" defTabSz="914400" rtl="0" eaLnBrk="1" latinLnBrk="0" hangingPunct="1">
+      <a:defRPr sz="1800" kern="1200">
+        <a:solidFill>
+          <a:schemeClr val="tx1"/>
+        </a:solidFill>
+        <a:latin typeface="+mn-lt"/>
+        <a:ea typeface="+mn-ea"/>
+        <a:cs typeface="+mn-cs"/>
+      </a:defRPr>
+    </a:lvl7pPr>
+    <a:lvl8pPr marL="3200400" algn="l" defTabSz="914400" rtl="0" eaLnBrk="1" latinLnBrk="0" hangingPunct="1">
+      <a:defRPr sz="1800" kern="1200">
+        <a:solidFill>
+          <a:schemeClr val="tx1"/>
+        </a:solidFill>
+        <a:latin typeface="+mn-lt"/>
+        <a:ea typeface="+mn-ea"/>
+        <a:cs typeface="+mn-cs"/>
+      </a:defRPr>
+    </a:lvl8pPr>
+    <a:lvl9pPr marL="3657600" algn="l" defTabSz="914400" rtl="0" eaLnBrk="1" latinLnBrk="0" hangingPunct="1">
+      <a:defRPr sz="1800" kern="1200">
+        <a:solidFill>
+          <a:schemeClr val="tx1"/>
+        </a:solidFill>
+        <a:latin typeface="+mn-lt"/>
+        <a:ea typeface="+mn-ea"/>
+        <a:cs typeface="+mn-cs"/>
+      </a:defRPr>
+    </a:lvl9pPr>
+  </p:defaultTextStyle>
+  <p:extLst>
+    <p:ext uri="{EFAFB233-063F-42B5-8137-9DF3F51BA10A}">
+      <p15:sldGuideLst xmlns:p15="http://schemas.microsoft.com/office/powerpoint/2012/main">
+        <p15:guide id="1" orient="horz" pos="2160">
+          <p15:clr>
+            <a:srgbClr val="A4A3A4"/>
+          </p15:clr>
+        </p15:guide>
+        <p15:guide id="2" pos="2880">
+          <p15:clr>
+            <a:srgbClr val="A4A3A4"/>
+          </p15:clr>
+        </p15:guide>
+      </p15:sldGuideLst>
+    </p:ext>
+    <p:ext uri="{2D200454-40CA-4A62-9FC3-DE9A4176ACB9}">
+      <p15:notesGuideLst xmlns:p15="http://schemas.microsoft.com/office/powerpoint/2012/main">
+        <p15:guide id="1" orient="horz" pos="2880">
+          <p15:clr>
+            <a:srgbClr val="A4A3A4"/>
+          </p15:clr>
+        </p15:guide>
+        <p15:guide id="2" pos="2160">
+          <p15:clr>
+            <a:srgbClr val="A4A3A4"/>
+          </p15:clr>
+        </p15:guide>
+      </p15:notesGuideLst>
+    </p:ext>
+  </p:extLst>
+</p:presentation>
+</file>
+
+<file path=ppt\slideLayouts\slideLayout1.xml><?xml version="1.0" encoding="utf-8"?>
 <p:sldLayout xmlns:a="http://schemas.openxmlformats.org/drawingml/2006/main" xmlns:r="http://schemas.openxmlformats.org/officeDocument/2006/relationships" xmlns:p="http://schemas.openxmlformats.org/presentationml/2006/main" type="title" preserve="1">
   <p:cSld name="Title Slide">
     <p:spTree>
@@ -3715,7 +3820,7 @@
 </p:sldLayout>
 </file>
 
-<file path=ppt/slideLayouts/slideLayout10.xml><?xml version="1.0" encoding="utf-8"?>
+<file path=ppt\slideLayouts\slideLayout10.xml><?xml version="1.0" encoding="utf-8"?>
 <p:sldLayout xmlns:a="http://schemas.openxmlformats.org/drawingml/2006/main" xmlns:r="http://schemas.openxmlformats.org/officeDocument/2006/relationships" xmlns:p="http://schemas.openxmlformats.org/presentationml/2006/main" type="vertTx" preserve="1">
   <p:cSld name="Title and Vertical Text">
     <p:spTree>
@@ -3883,7 +3988,7 @@
 </p:sldLayout>
 </file>
 
-<file path=ppt/slideLayouts/slideLayout11.xml><?xml version="1.0" encoding="utf-8"?>
+<file path=ppt\slideLayouts\slideLayout11.xml><?xml version="1.0" encoding="utf-8"?>
 <p:sldLayout xmlns:a="http://schemas.openxmlformats.org/drawingml/2006/main" xmlns:r="http://schemas.openxmlformats.org/officeDocument/2006/relationships" xmlns:p="http://schemas.openxmlformats.org/presentationml/2006/main" type="vertTitleAndTx" preserve="1">
   <p:cSld name="Vertical Title and Text">
     <p:spTree>
@@ -4061,7 +4166,7 @@
 </p:sldLayout>
 </file>
 
-<file path=ppt/slideLayouts/slideLayout2.xml><?xml version="1.0" encoding="utf-8"?>
+<file path=ppt\slideLayouts\slideLayout2.xml><?xml version="1.0" encoding="utf-8"?>
 <p:sldLayout xmlns:a="http://schemas.openxmlformats.org/drawingml/2006/main" xmlns:r="http://schemas.openxmlformats.org/officeDocument/2006/relationships" xmlns:p="http://schemas.openxmlformats.org/presentationml/2006/main" type="obj" preserve="1">
   <p:cSld name="Title and Content">
     <p:spTree>
@@ -4246,7 +4351,7 @@
 </p:sldLayout>
 </file>
 
-<file path=ppt/slideLayouts/slideLayout3.xml><?xml version="1.0" encoding="utf-8"?>
+<file path=ppt\slideLayouts\slideLayout3.xml><?xml version="1.0" encoding="utf-8"?>
 <p:sldLayout xmlns:a="http://schemas.openxmlformats.org/drawingml/2006/main" xmlns:r="http://schemas.openxmlformats.org/officeDocument/2006/relationships" xmlns:p="http://schemas.openxmlformats.org/presentationml/2006/main" type="secHead" preserve="1">
   <p:cSld name="Section Header">
     <p:spTree>
@@ -4491,7 +4596,7 @@
 </p:sldLayout>
 </file>
 
-<file path=ppt/slideLayouts/slideLayout4.xml><?xml version="1.0" encoding="utf-8"?>
+<file path=ppt\slideLayouts\slideLayout4.xml><?xml version="1.0" encoding="utf-8"?>
 <p:sldLayout xmlns:a="http://schemas.openxmlformats.org/drawingml/2006/main" xmlns:r="http://schemas.openxmlformats.org/officeDocument/2006/relationships" xmlns:p="http://schemas.openxmlformats.org/presentationml/2006/main" type="twoObj" preserve="1">
   <p:cSld name="Two Content">
     <p:spTree>
@@ -4776,7 +4881,7 @@
 </p:sldLayout>
 </file>
 
-<file path=ppt/slideLayouts/slideLayout5.xml><?xml version="1.0" encoding="utf-8"?>
+<file path=ppt\slideLayouts\slideLayout5.xml><?xml version="1.0" encoding="utf-8"?>
 <p:sldLayout xmlns:a="http://schemas.openxmlformats.org/drawingml/2006/main" xmlns:r="http://schemas.openxmlformats.org/officeDocument/2006/relationships" xmlns:p="http://schemas.openxmlformats.org/presentationml/2006/main" type="twoTxTwoObj" preserve="1">
   <p:cSld name="Comparison">
     <p:spTree>
@@ -5195,7 +5300,7 @@
 </p:sldLayout>
 </file>
 
-<file path=ppt/slideLayouts/slideLayout6.xml><?xml version="1.0" encoding="utf-8"?>
+<file path=ppt\slideLayouts\slideLayout6.xml><?xml version="1.0" encoding="utf-8"?>
 <p:sldLayout xmlns:a="http://schemas.openxmlformats.org/drawingml/2006/main" xmlns:r="http://schemas.openxmlformats.org/officeDocument/2006/relationships" xmlns:p="http://schemas.openxmlformats.org/presentationml/2006/main" type="titleOnly" preserve="1">
   <p:cSld name="Title Only">
     <p:spTree>
@@ -5312,7 +5417,7 @@
 </p:sldLayout>
 </file>
 
-<file path=ppt/slideLayouts/slideLayout7.xml><?xml version="1.0" encoding="utf-8"?>
+<file path=ppt\slideLayouts\slideLayout7.xml><?xml version="1.0" encoding="utf-8"?>
 <p:sldLayout xmlns:a="http://schemas.openxmlformats.org/drawingml/2006/main" xmlns:r="http://schemas.openxmlformats.org/officeDocument/2006/relationships" xmlns:p="http://schemas.openxmlformats.org/presentationml/2006/main" type="blank" preserve="1">
   <p:cSld name="Blank">
     <p:spTree>
@@ -5407,7 +5512,7 @@
 </p:sldLayout>
 </file>
 
-<file path=ppt/slideLayouts/slideLayout8.xml><?xml version="1.0" encoding="utf-8"?>
+<file path=ppt\slideLayouts\slideLayout8.xml><?xml version="1.0" encoding="utf-8"?>
 <p:sldLayout xmlns:a="http://schemas.openxmlformats.org/drawingml/2006/main" xmlns:r="http://schemas.openxmlformats.org/officeDocument/2006/relationships" xmlns:p="http://schemas.openxmlformats.org/presentationml/2006/main" type="objTx" preserve="1">
   <p:cSld name="Content with Caption">
     <p:spTree>
@@ -5682,7 +5787,7 @@
 </p:sldLayout>
 </file>
 
-<file path=ppt/slideLayouts/slideLayout9.xml><?xml version="1.0" encoding="utf-8"?>
+<file path=ppt\slideLayouts\slideLayout9.xml><?xml version="1.0" encoding="utf-8"?>
 <p:sldLayout xmlns:a="http://schemas.openxmlformats.org/drawingml/2006/main" xmlns:r="http://schemas.openxmlformats.org/officeDocument/2006/relationships" xmlns:p="http://schemas.openxmlformats.org/presentationml/2006/main" type="picTx" preserve="1">
   <p:cSld name="Picture with Caption">
     <p:spTree>
@@ -5934,7 +6039,7 @@
 </p:sldLayout>
 </file>
 
-<file path=ppt/slideMasters/slideMaster1.xml><?xml version="1.0" encoding="utf-8"?>
+<file path=ppt\slideMasters\slideMaster1.xml><?xml version="1.0" encoding="utf-8"?>
 <p:sldMaster xmlns:a="http://schemas.openxmlformats.org/drawingml/2006/main" xmlns:r="http://schemas.openxmlformats.org/officeDocument/2006/relationships" xmlns:p="http://schemas.openxmlformats.org/presentationml/2006/main" preserve="1">
   <p:cSld>
     <p:bg>
@@ -6454,7 +6559,7 @@
 </p:sldMaster>
 </file>
 
-<file path=ppt/slides/slide1.xml><?xml version="1.0" encoding="utf-8"?>
+<file path=ppt\slides\slide1.xml><?xml version="1.0" encoding="utf-8"?>
 <p:sld xmlns:a="http://schemas.openxmlformats.org/drawingml/2006/main" xmlns:r="http://schemas.openxmlformats.org/officeDocument/2006/relationships" xmlns:p="http://schemas.openxmlformats.org/presentationml/2006/main">
   <p:cSld>
     <p:bg>
@@ -6666,7 +6771,7 @@
 </p:sld>
 </file>
 
-<file path=ppt/slides/slide10.xml><?xml version="1.0" encoding="utf-8"?>
+<file path=ppt\slides\slide10.xml><?xml version="1.0" encoding="utf-8"?>
 <p:sld xmlns:a="http://schemas.openxmlformats.org/drawingml/2006/main" xmlns:r="http://schemas.openxmlformats.org/officeDocument/2006/relationships" xmlns:p="http://schemas.openxmlformats.org/presentationml/2006/main">
   <p:cSld>
     <p:spTree>
@@ -6843,13 +6948,13 @@
               <a:rPr lang="en-US" sz="1800" dirty="0">
                 <a:latin typeface="Calibri" panose="020F0502020204030204" pitchFamily="34" charset="0"/>
                 <a:cs typeface="Calibri" panose="020F0502020204030204" pitchFamily="34" charset="0"/>
-                <a:sym typeface="Symbol MT" panose="05050102010706020507" pitchFamily="18" charset="2"/>
+                <a:sym typeface="Symbol" panose="05050102010706020507" pitchFamily="18" charset="2"/>
               </a:rPr>
               <a:t>≡</a:t>
             </a:r>
             <a:r>
               <a:rPr lang="en-US" sz="1800" dirty="0">
-                <a:sym typeface="Symbol MT" panose="05050102010706020507" pitchFamily="18" charset="2"/>
+                <a:sym typeface="Symbol" panose="05050102010706020507" pitchFamily="18" charset="2"/>
               </a:rPr>
               <a:t> A * B + C</a:t>
             </a:r>
@@ -6865,13 +6970,13 @@
               <a:rPr lang="en-US" sz="1800" dirty="0">
                 <a:latin typeface="Calibri" panose="020F0502020204030204" pitchFamily="34" charset="0"/>
                 <a:cs typeface="Calibri" panose="020F0502020204030204" pitchFamily="34" charset="0"/>
-                <a:sym typeface="Symbol MT" panose="05050102010706020507" pitchFamily="18" charset="2"/>
+                <a:sym typeface="Symbol" panose="05050102010706020507" pitchFamily="18" charset="2"/>
               </a:rPr>
               <a:t>≡ </a:t>
             </a:r>
             <a:r>
               <a:rPr lang="en-US" sz="1800" dirty="0">
-                <a:sym typeface="Symbol MT" panose="05050102010706020507" pitchFamily="18" charset="2"/>
+                <a:sym typeface="Symbol" panose="05050102010706020507" pitchFamily="18" charset="2"/>
               </a:rPr>
               <a:t>A </a:t>
             </a:r>
@@ -7251,7 +7356,7 @@
 </p:sld>
 </file>
 
-<file path=ppt/slides/slide11.xml><?xml version="1.0" encoding="utf-8"?>
+<file path=ppt\slides\slide11.xml><?xml version="1.0" encoding="utf-8"?>
 <p:sld xmlns:a="http://schemas.openxmlformats.org/drawingml/2006/main" xmlns:r="http://schemas.openxmlformats.org/officeDocument/2006/relationships" xmlns:p="http://schemas.openxmlformats.org/presentationml/2006/main">
   <p:cSld>
     <p:spTree>
@@ -7430,7 +7535,7 @@
 </p:sld>
 </file>
 
-<file path=ppt/slides/slide12.xml><?xml version="1.0" encoding="utf-8"?>
+<file path=ppt\slides\slide12.xml><?xml version="1.0" encoding="utf-8"?>
 <p:sld xmlns:a="http://schemas.openxmlformats.org/drawingml/2006/main" xmlns:r="http://schemas.openxmlformats.org/officeDocument/2006/relationships" xmlns:p="http://schemas.openxmlformats.org/presentationml/2006/main">
   <p:cSld>
     <p:spTree>
@@ -7680,7 +7785,7 @@
 </p:sld>
 </file>
 
-<file path=ppt/slides/slide13.xml><?xml version="1.0" encoding="utf-8"?>
+<file path=ppt\slides\slide13.xml><?xml version="1.0" encoding="utf-8"?>
 <p:sld xmlns:a="http://schemas.openxmlformats.org/drawingml/2006/main" xmlns:r="http://schemas.openxmlformats.org/officeDocument/2006/relationships" xmlns:p="http://schemas.openxmlformats.org/presentationml/2006/main">
   <p:cSld>
     <p:spTree>
@@ -7859,7 +7964,7 @@
 </p:sld>
 </file>
 
-<file path=ppt/slides/slide14.xml><?xml version="1.0" encoding="utf-8"?>
+<file path=ppt\slides\slide14.xml><?xml version="1.0" encoding="utf-8"?>
 <p:sld xmlns:a="http://schemas.openxmlformats.org/drawingml/2006/main" xmlns:r="http://schemas.openxmlformats.org/officeDocument/2006/relationships" xmlns:p="http://schemas.openxmlformats.org/presentationml/2006/main">
   <p:cSld>
     <p:spTree>
@@ -8065,7 +8170,7 @@
 </p:sld>
 </file>
 
-<file path=ppt/slides/slide15.xml><?xml version="1.0" encoding="utf-8"?>
+<file path=ppt\slides\slide15.xml><?xml version="1.0" encoding="utf-8"?>
 <p:sld xmlns:a="http://schemas.openxmlformats.org/drawingml/2006/main" xmlns:r="http://schemas.openxmlformats.org/officeDocument/2006/relationships" xmlns:p="http://schemas.openxmlformats.org/presentationml/2006/main">
   <p:cSld>
     <p:spTree>
@@ -8244,7 +8349,7 @@
 </p:sld>
 </file>
 
-<file path=ppt/slides/slide16.xml><?xml version="1.0" encoding="utf-8"?>
+<file path=ppt\slides\slide16.xml><?xml version="1.0" encoding="utf-8"?>
 <p:sld xmlns:a="http://schemas.openxmlformats.org/drawingml/2006/main" xmlns:r="http://schemas.openxmlformats.org/officeDocument/2006/relationships" xmlns:p="http://schemas.openxmlformats.org/presentationml/2006/main">
   <p:cSld>
     <p:spTree>
@@ -9083,7 +9188,7 @@
 </p:sld>
 </file>
 
-<file path=ppt/slides/slide17.xml><?xml version="1.0" encoding="utf-8"?>
+<file path=ppt\slides\slide17.xml><?xml version="1.0" encoding="utf-8"?>
 <p:sld xmlns:a="http://schemas.openxmlformats.org/drawingml/2006/main" xmlns:r="http://schemas.openxmlformats.org/officeDocument/2006/relationships" xmlns:p="http://schemas.openxmlformats.org/presentationml/2006/main">
   <p:cSld>
     <p:spTree>
@@ -9262,7 +9367,7 @@
 </p:sld>
 </file>
 
-<file path=ppt/slides/slide18.xml><?xml version="1.0" encoding="utf-8"?>
+<file path=ppt\slides\slide18.xml><?xml version="1.0" encoding="utf-8"?>
 <p:sld xmlns:a="http://schemas.openxmlformats.org/drawingml/2006/main" xmlns:r="http://schemas.openxmlformats.org/officeDocument/2006/relationships" xmlns:p="http://schemas.openxmlformats.org/presentationml/2006/main">
   <p:cSld>
     <p:spTree>
@@ -9856,7 +9961,7 @@
 </p:sld>
 </file>
 
-<file path=ppt/slides/slide19.xml><?xml version="1.0" encoding="utf-8"?>
+<file path=ppt\slides\slide19.xml><?xml version="1.0" encoding="utf-8"?>
 <p:sld xmlns:a="http://schemas.openxmlformats.org/drawingml/2006/main" xmlns:r="http://schemas.openxmlformats.org/officeDocument/2006/relationships" xmlns:p="http://schemas.openxmlformats.org/presentationml/2006/main">
   <p:cSld>
     <p:spTree>
@@ -10035,7 +10140,7 @@
 </p:sld>
 </file>
 
-<file path=ppt/slides/slide2.xml><?xml version="1.0" encoding="utf-8"?>
+<file path=ppt\slides\slide2.xml><?xml version="1.0" encoding="utf-8"?>
 <p:sld xmlns:a="http://schemas.openxmlformats.org/drawingml/2006/main" xmlns:r="http://schemas.openxmlformats.org/officeDocument/2006/relationships" xmlns:p="http://schemas.openxmlformats.org/presentationml/2006/main">
   <p:cSld>
     <p:bg>
@@ -10252,7 +10357,7 @@
 </p:sld>
 </file>
 
-<file path=ppt/slides/slide20.xml><?xml version="1.0" encoding="utf-8"?>
+<file path=ppt\slides\slide20.xml><?xml version="1.0" encoding="utf-8"?>
 <p:sld xmlns:a="http://schemas.openxmlformats.org/drawingml/2006/main" xmlns:r="http://schemas.openxmlformats.org/officeDocument/2006/relationships" xmlns:p="http://schemas.openxmlformats.org/presentationml/2006/main">
   <p:cSld>
     <p:spTree>
@@ -10844,7 +10949,7 @@
 </p:sld>
 </file>
 
-<file path=ppt/slides/slide21.xml><?xml version="1.0" encoding="utf-8"?>
+<file path=ppt\slides\slide21.xml><?xml version="1.0" encoding="utf-8"?>
 <p:sld xmlns:a="http://schemas.openxmlformats.org/drawingml/2006/main" xmlns:r="http://schemas.openxmlformats.org/officeDocument/2006/relationships" xmlns:p="http://schemas.openxmlformats.org/presentationml/2006/main">
   <p:cSld>
     <p:spTree>
@@ -11023,7 +11128,7 @@
 </p:sld>
 </file>
 
-<file path=ppt/slides/slide22.xml><?xml version="1.0" encoding="utf-8"?>
+<file path=ppt\slides\slide22.xml><?xml version="1.0" encoding="utf-8"?>
 <p:sld xmlns:a="http://schemas.openxmlformats.org/drawingml/2006/main" xmlns:r="http://schemas.openxmlformats.org/officeDocument/2006/relationships" xmlns:p="http://schemas.openxmlformats.org/presentationml/2006/main">
   <p:cSld>
     <p:spTree>
@@ -11194,7 +11299,7 @@
 </p:sld>
 </file>
 
-<file path=ppt/slides/slide23.xml><?xml version="1.0" encoding="utf-8"?>
+<file path=ppt\slides\slide23.xml><?xml version="1.0" encoding="utf-8"?>
 <p:sld xmlns:a="http://schemas.openxmlformats.org/drawingml/2006/main" xmlns:r="http://schemas.openxmlformats.org/officeDocument/2006/relationships" xmlns:p="http://schemas.openxmlformats.org/presentationml/2006/main">
   <p:cSld>
     <p:spTree>
@@ -11345,7 +11450,7 @@
 </p:sld>
 </file>
 
-<file path=ppt/slides/slide24.xml><?xml version="1.0" encoding="utf-8"?>
+<file path=ppt\slides\slide24.xml><?xml version="1.0" encoding="utf-8"?>
 <p:sld xmlns:a="http://schemas.openxmlformats.org/drawingml/2006/main" xmlns:r="http://schemas.openxmlformats.org/officeDocument/2006/relationships" xmlns:p="http://schemas.openxmlformats.org/presentationml/2006/main">
   <p:cSld>
     <p:spTree>
@@ -11483,7 +11588,7 @@
 </p:sld>
 </file>
 
-<file path=ppt/slides/slide25.xml><?xml version="1.0" encoding="utf-8"?>
+<file path=ppt\slides\slide25.xml><?xml version="1.0" encoding="utf-8"?>
 <p:sld xmlns:a="http://schemas.openxmlformats.org/drawingml/2006/main" xmlns:r="http://schemas.openxmlformats.org/officeDocument/2006/relationships" xmlns:p="http://schemas.openxmlformats.org/presentationml/2006/main">
   <p:cSld>
     <p:spTree>
@@ -11628,7 +11733,7 @@
 </p:sld>
 </file>
 
-<file path=ppt/slides/slide26.xml><?xml version="1.0" encoding="utf-8"?>
+<file path=ppt\slides\slide26.xml><?xml version="1.0" encoding="utf-8"?>
 <p:sld xmlns:a="http://schemas.openxmlformats.org/drawingml/2006/main" xmlns:r="http://schemas.openxmlformats.org/officeDocument/2006/relationships" xmlns:p="http://schemas.openxmlformats.org/presentationml/2006/main">
   <p:cSld>
     <p:spTree>
@@ -11722,7 +11827,7 @@
 </p:sld>
 </file>
 
-<file path=ppt/slides/slide3.xml><?xml version="1.0" encoding="utf-8"?>
+<file path=ppt\slides\slide3.xml><?xml version="1.0" encoding="utf-8"?>
 <p:sld xmlns:a="http://schemas.openxmlformats.org/drawingml/2006/main" xmlns:r="http://schemas.openxmlformats.org/officeDocument/2006/relationships" xmlns:p="http://schemas.openxmlformats.org/presentationml/2006/main">
   <p:cSld>
     <p:spTree>
@@ -11837,7 +11942,7 @@
 </p:sld>
 </file>
 
-<file path=ppt/slides/slide4.xml><?xml version="1.0" encoding="utf-8"?>
+<file path=ppt\slides\slide4.xml><?xml version="1.0" encoding="utf-8"?>
 <p:sld xmlns:a="http://schemas.openxmlformats.org/drawingml/2006/main" xmlns:r="http://schemas.openxmlformats.org/officeDocument/2006/relationships" xmlns:p="http://schemas.openxmlformats.org/presentationml/2006/main">
   <p:cSld>
     <p:spTree>
@@ -12683,7 +12788,7 @@
 </p:sld>
 </file>
 
-<file path=ppt/slides/slide5.xml><?xml version="1.0" encoding="utf-8"?>
+<file path=ppt\slides\slide5.xml><?xml version="1.0" encoding="utf-8"?>
 <p:sld xmlns:a="http://schemas.openxmlformats.org/drawingml/2006/main" xmlns:r="http://schemas.openxmlformats.org/officeDocument/2006/relationships" xmlns:p="http://schemas.openxmlformats.org/presentationml/2006/main">
   <p:cSld>
     <p:spTree>
@@ -12862,7 +12967,7 @@
 </p:sld>
 </file>
 
-<file path=ppt/slides/slide6.xml><?xml version="1.0" encoding="utf-8"?>
+<file path=ppt\slides\slide6.xml><?xml version="1.0" encoding="utf-8"?>
 <p:sld xmlns:a="http://schemas.openxmlformats.org/drawingml/2006/main" xmlns:r="http://schemas.openxmlformats.org/officeDocument/2006/relationships" xmlns:p="http://schemas.openxmlformats.org/presentationml/2006/main">
   <p:cSld>
     <p:spTree>
@@ -13767,7 +13872,7 @@
 </p:sld>
 </file>
 
-<file path=ppt/slides/slide7.xml><?xml version="1.0" encoding="utf-8"?>
+<file path=ppt\slides\slide7.xml><?xml version="1.0" encoding="utf-8"?>
 <p:sld xmlns:a="http://schemas.openxmlformats.org/drawingml/2006/main" xmlns:r="http://schemas.openxmlformats.org/officeDocument/2006/relationships" xmlns:p="http://schemas.openxmlformats.org/presentationml/2006/main">
   <p:cSld>
     <p:spTree>
@@ -13946,7 +14051,7 @@
 </p:sld>
 </file>
 
-<file path=ppt/slides/slide8.xml><?xml version="1.0" encoding="utf-8"?>
+<file path=ppt\slides\slide8.xml><?xml version="1.0" encoding="utf-8"?>
 <p:sld xmlns:a="http://schemas.openxmlformats.org/drawingml/2006/main" xmlns:r="http://schemas.openxmlformats.org/officeDocument/2006/relationships" xmlns:p="http://schemas.openxmlformats.org/presentationml/2006/main">
   <p:cSld>
     <p:spTree>
@@ -14540,7 +14645,7 @@
 </p:sld>
 </file>
 
-<file path=ppt/slides/slide9.xml><?xml version="1.0" encoding="utf-8"?>
+<file path=ppt\slides\slide9.xml><?xml version="1.0" encoding="utf-8"?>
 <p:sld xmlns:a="http://schemas.openxmlformats.org/drawingml/2006/main" xmlns:r="http://schemas.openxmlformats.org/officeDocument/2006/relationships" xmlns:p="http://schemas.openxmlformats.org/presentationml/2006/main">
   <p:cSld>
     <p:spTree>
@@ -14719,7 +14824,189 @@
 </p:sld>
 </file>
 
-<file path=ppt/theme/theme1.xml><?xml version="1.0" encoding="utf-8"?>
+<file path=ppt\tableStyles.xml><?xml version="1.0" encoding="utf-8"?>
+<a:tblStyleLst xmlns:a="http://schemas.openxmlformats.org/drawingml/2006/main" def="{5C22544A-7EE6-4342-B048-85BDC9FD1C3A}">
+  <a:tblStyle styleId="{5C22544A-7EE6-4342-B048-85BDC9FD1C3A}" styleName="Medium Style 2 - Accent 1">
+    <a:wholeTbl>
+      <a:tcTxStyle>
+        <a:fontRef idx="minor">
+          <a:prstClr val="black"/>
+        </a:fontRef>
+        <a:schemeClr val="dk1"/>
+      </a:tcTxStyle>
+      <a:tcStyle>
+        <a:tcBdr>
+          <a:left>
+            <a:ln w="12700" cmpd="sng">
+              <a:solidFill>
+                <a:schemeClr val="lt1"/>
+              </a:solidFill>
+            </a:ln>
+          </a:left>
+          <a:right>
+            <a:ln w="12700" cmpd="sng">
+              <a:solidFill>
+                <a:schemeClr val="lt1"/>
+              </a:solidFill>
+            </a:ln>
+          </a:right>
+          <a:top>
+            <a:ln w="12700" cmpd="sng">
+              <a:solidFill>
+                <a:schemeClr val="lt1"/>
+              </a:solidFill>
+            </a:ln>
+          </a:top>
+          <a:bottom>
+            <a:ln w="12700" cmpd="sng">
+              <a:solidFill>
+                <a:schemeClr val="lt1"/>
+              </a:solidFill>
+            </a:ln>
+          </a:bottom>
+          <a:insideH>
+            <a:ln w="12700" cmpd="sng">
+              <a:solidFill>
+                <a:schemeClr val="lt1"/>
+              </a:solidFill>
+            </a:ln>
+          </a:insideH>
+          <a:insideV>
+            <a:ln w="12700" cmpd="sng">
+              <a:solidFill>
+                <a:schemeClr val="lt1"/>
+              </a:solidFill>
+            </a:ln>
+          </a:insideV>
+        </a:tcBdr>
+        <a:fill>
+          <a:solidFill>
+            <a:schemeClr val="accent1">
+              <a:tint val="20000"/>
+            </a:schemeClr>
+          </a:solidFill>
+        </a:fill>
+      </a:tcStyle>
+    </a:wholeTbl>
+    <a:band1H>
+      <a:tcStyle>
+        <a:tcBdr/>
+        <a:fill>
+          <a:solidFill>
+            <a:schemeClr val="accent1">
+              <a:tint val="40000"/>
+            </a:schemeClr>
+          </a:solidFill>
+        </a:fill>
+      </a:tcStyle>
+    </a:band1H>
+    <a:band2H>
+      <a:tcStyle>
+        <a:tcBdr/>
+      </a:tcStyle>
+    </a:band2H>
+    <a:band1V>
+      <a:tcStyle>
+        <a:tcBdr/>
+        <a:fill>
+          <a:solidFill>
+            <a:schemeClr val="accent1">
+              <a:tint val="40000"/>
+            </a:schemeClr>
+          </a:solidFill>
+        </a:fill>
+      </a:tcStyle>
+    </a:band1V>
+    <a:band2V>
+      <a:tcStyle>
+        <a:tcBdr/>
+      </a:tcStyle>
+    </a:band2V>
+    <a:lastCol>
+      <a:tcTxStyle b="on">
+        <a:fontRef idx="minor">
+          <a:prstClr val="black"/>
+        </a:fontRef>
+        <a:schemeClr val="lt1"/>
+      </a:tcTxStyle>
+      <a:tcStyle>
+        <a:tcBdr/>
+        <a:fill>
+          <a:solidFill>
+            <a:schemeClr val="accent1"/>
+          </a:solidFill>
+        </a:fill>
+      </a:tcStyle>
+    </a:lastCol>
+    <a:firstCol>
+      <a:tcTxStyle b="on">
+        <a:fontRef idx="minor">
+          <a:prstClr val="black"/>
+        </a:fontRef>
+        <a:schemeClr val="lt1"/>
+      </a:tcTxStyle>
+      <a:tcStyle>
+        <a:tcBdr/>
+        <a:fill>
+          <a:solidFill>
+            <a:schemeClr val="accent1"/>
+          </a:solidFill>
+        </a:fill>
+      </a:tcStyle>
+    </a:firstCol>
+    <a:lastRow>
+      <a:tcTxStyle b="on">
+        <a:fontRef idx="minor">
+          <a:prstClr val="black"/>
+        </a:fontRef>
+        <a:schemeClr val="lt1"/>
+      </a:tcTxStyle>
+      <a:tcStyle>
+        <a:tcBdr>
+          <a:top>
+            <a:ln w="38100" cmpd="sng">
+              <a:solidFill>
+                <a:schemeClr val="lt1"/>
+              </a:solidFill>
+            </a:ln>
+          </a:top>
+        </a:tcBdr>
+        <a:fill>
+          <a:solidFill>
+            <a:schemeClr val="accent1"/>
+          </a:solidFill>
+        </a:fill>
+      </a:tcStyle>
+    </a:lastRow>
+    <a:firstRow>
+      <a:tcTxStyle b="on">
+        <a:fontRef idx="minor">
+          <a:prstClr val="black"/>
+        </a:fontRef>
+        <a:schemeClr val="lt1"/>
+      </a:tcTxStyle>
+      <a:tcStyle>
+        <a:tcBdr>
+          <a:bottom>
+            <a:ln w="38100" cmpd="sng">
+              <a:solidFill>
+                <a:schemeClr val="lt1"/>
+              </a:solidFill>
+            </a:ln>
+          </a:bottom>
+        </a:tcBdr>
+        <a:fill>
+          <a:solidFill>
+            <a:schemeClr val="accent1"/>
+          </a:solidFill>
+        </a:fill>
+      </a:tcStyle>
+    </a:firstRow>
+  </a:tblStyle>
+</a:tblStyleLst>
+</file>
+
+<file path=ppt\theme\theme1.xml><?xml version="1.0" encoding="utf-8"?>
 <a:theme xmlns:a="http://schemas.openxmlformats.org/drawingml/2006/main" name="1_Office Theme">
   <a:themeElements>
     <a:clrScheme name="Office">
@@ -15004,7 +15291,7 @@
 </a:theme>
 </file>
 
-<file path=ppt/theme/theme2.xml><?xml version="1.0" encoding="utf-8"?>
+<file path=ppt\theme\theme2.xml><?xml version="1.0" encoding="utf-8"?>
 <a:theme xmlns:a="http://schemas.openxmlformats.org/drawingml/2006/main" name="Office Theme">
   <a:themeElements>
     <a:clrScheme name="Office">
@@ -15287,4 +15574,62 @@
   <a:objectDefaults/>
   <a:extraClrSchemeLst/>
 </a:theme>
+</file>
+
+<file path=ppt\viewProps.xml><?xml version="1.0" encoding="utf-8"?>
+<p:viewPr xmlns:a="http://schemas.openxmlformats.org/drawingml/2006/main" xmlns:r="http://schemas.openxmlformats.org/officeDocument/2006/relationships" xmlns:p="http://schemas.openxmlformats.org/presentationml/2006/main">
+  <p:normalViewPr>
+    <p:restoredLeft sz="15620"/>
+    <p:restoredTop sz="94660"/>
+  </p:normalViewPr>
+  <p:slideViewPr>
+    <p:cSldViewPr>
+      <p:cViewPr varScale="1">
+        <p:scale>
+          <a:sx n="97" d="100"/>
+          <a:sy n="97" d="100"/>
+        </p:scale>
+        <p:origin x="1218" y="96"/>
+      </p:cViewPr>
+      <p:guideLst>
+        <p:guide orient="horz" pos="2160"/>
+        <p:guide pos="2880"/>
+      </p:guideLst>
+    </p:cSldViewPr>
+  </p:slideViewPr>
+  <p:notesTextViewPr>
+    <p:cViewPr>
+      <p:scale>
+        <a:sx n="1" d="1"/>
+        <a:sy n="1" d="1"/>
+      </p:scale>
+      <p:origin x="0" y="0"/>
+    </p:cViewPr>
+  </p:notesTextViewPr>
+  <p:sorterViewPr>
+    <p:cViewPr>
+      <p:scale>
+        <a:sx n="100" d="100"/>
+        <a:sy n="100" d="100"/>
+      </p:scale>
+      <p:origin x="0" y="0"/>
+    </p:cViewPr>
+  </p:sorterViewPr>
+  <p:notesViewPr>
+    <p:cSldViewPr>
+      <p:cViewPr varScale="1">
+        <p:scale>
+          <a:sx n="87" d="100"/>
+          <a:sy n="87" d="100"/>
+        </p:scale>
+        <p:origin x="-2040" y="-72"/>
+      </p:cViewPr>
+      <p:guideLst>
+        <p:guide orient="horz" pos="2880"/>
+        <p:guide pos="2160"/>
+      </p:guideLst>
+    </p:cSldViewPr>
+  </p:notesViewPr>
+  <p:gridSpacing cx="76200" cy="76200"/>
+</p:viewPr>
 </file>